--- a/class/cloud_infra_mgmt/05주차_Kubernetes핵심1/01_강의자료/3차시_Endpoints와라운드로빈.pptx
+++ b/class/cloud_infra_mgmt/05주차_Kubernetes핵심1/01_강의자료/3차시_Endpoints와라운드로빈.pptx
@@ -9153,7 +9153,7 @@
               </a:lnSpc>
             </a:pPr>
             <a:r>
-              <a:rPr sz="1500" b="1">
+              <a:rPr sz="1700" b="1">
                 <a:solidFill>
                   <a:srgbClr val="0D9488"/>
                 </a:solidFill>
@@ -9162,7 +9162,7 @@
               <a:t>●  </a:t>
             </a:r>
             <a:r>
-              <a:rPr sz="1500" b="0">
+              <a:rPr sz="1700" b="0">
                 <a:solidFill>
                   <a:srgbClr val="222733"/>
                 </a:solidFill>
@@ -9178,7 +9178,7 @@
               </a:lnSpc>
             </a:pPr>
             <a:r>
-              <a:rPr sz="1500" b="1">
+              <a:rPr sz="1700" b="1">
                 <a:solidFill>
                   <a:srgbClr val="0D9488"/>
                 </a:solidFill>
@@ -9187,7 +9187,7 @@
               <a:t>●  </a:t>
             </a:r>
             <a:r>
-              <a:rPr sz="1500" b="0">
+              <a:rPr sz="1700" b="0">
                 <a:solidFill>
                   <a:srgbClr val="222733"/>
                 </a:solidFill>
@@ -9203,7 +9203,7 @@
               </a:lnSpc>
             </a:pPr>
             <a:r>
-              <a:rPr sz="1500" b="1">
+              <a:rPr sz="1700" b="1">
                 <a:solidFill>
                   <a:srgbClr val="0D9488"/>
                 </a:solidFill>
@@ -9212,7 +9212,7 @@
               <a:t>●  </a:t>
             </a:r>
             <a:r>
-              <a:rPr sz="1500" b="0">
+              <a:rPr sz="1700" b="0">
                 <a:solidFill>
                   <a:srgbClr val="222733"/>
                 </a:solidFill>

--- a/class/cloud_infra_mgmt/05주차_Kubernetes핵심1/01_강의자료/3차시_Endpoints와라운드로빈.pptx
+++ b/class/cloud_infra_mgmt/05주차_Kubernetes핵심1/01_강의자료/3차시_Endpoints와라운드로빈.pptx
@@ -5189,7 +5189,7 @@
           <a:p>
             <a:pPr>
               <a:lnSpc>
-                <a:spcPct val="115000"/>
+                <a:spcPct val="149500"/>
               </a:lnSpc>
             </a:pPr>
             <a:r>
@@ -5214,7 +5214,7 @@
           <a:p>
             <a:pPr>
               <a:lnSpc>
-                <a:spcPct val="115000"/>
+                <a:spcPct val="149500"/>
               </a:lnSpc>
             </a:pPr>
             <a:r>
@@ -5239,7 +5239,7 @@
           <a:p>
             <a:pPr>
               <a:lnSpc>
-                <a:spcPct val="115000"/>
+                <a:spcPct val="149500"/>
               </a:lnSpc>
             </a:pPr>
             <a:r>
@@ -6747,16 +6747,104 @@
       </p:sp>
       <p:sp>
         <p:nvSpPr>
-          <p:cNvPr id="7" name="Isosceles Triangle 6"/>
+          <p:cNvPr id="7" name="Rectangle 6"/>
           <p:cNvSpPr/>
           <p:nvPr/>
         </p:nvSpPr>
         <p:spPr>
-          <a:xfrm rot="5400000">
-            <a:off x="3495751" y="1673352"/>
-            <a:ext cx="146304" cy="146304"/>
-          </a:xfrm>
-          <a:prstGeom prst="triangle">
+          <a:xfrm>
+            <a:off x="5096865" y="1730959"/>
+            <a:ext cx="1995220" cy="31089"/>
+          </a:xfrm>
+          <a:prstGeom prst="rect">
+            <a:avLst/>
+          </a:prstGeom>
+          <a:solidFill>
+            <a:srgbClr val="14B8A6"/>
+          </a:solidFill>
+          <a:ln>
+            <a:noFill/>
+          </a:ln>
+          <a:effectLst/>
+        </p:spPr>
+        <p:style>
+          <a:lnRef idx="1">
+            <a:schemeClr val="accent1"/>
+          </a:lnRef>
+          <a:fillRef idx="3">
+            <a:schemeClr val="accent1"/>
+          </a:fillRef>
+          <a:effectRef idx="2">
+            <a:schemeClr val="accent1"/>
+          </a:effectRef>
+          <a:fontRef idx="minor">
+            <a:schemeClr val="lt1"/>
+          </a:fontRef>
+        </p:style>
+        <p:txBody>
+          <a:bodyPr rtlCol="0" anchor="ctr"/>
+          <a:lstStyle/>
+          <a:p>
+            <a:pPr algn="ctr"/>
+          </a:p>
+        </p:txBody>
+      </p:sp>
+      <p:sp>
+        <p:nvSpPr>
+          <p:cNvPr id="8" name="Rectangle 7"/>
+          <p:cNvSpPr/>
+          <p:nvPr/>
+        </p:nvSpPr>
+        <p:spPr>
+          <a:xfrm>
+            <a:off x="7622438" y="1730959"/>
+            <a:ext cx="1995220" cy="31089"/>
+          </a:xfrm>
+          <a:prstGeom prst="rect">
+            <a:avLst/>
+          </a:prstGeom>
+          <a:solidFill>
+            <a:srgbClr val="14B8A6"/>
+          </a:solidFill>
+          <a:ln>
+            <a:noFill/>
+          </a:ln>
+          <a:effectLst/>
+        </p:spPr>
+        <p:style>
+          <a:lnRef idx="1">
+            <a:schemeClr val="accent1"/>
+          </a:lnRef>
+          <a:fillRef idx="3">
+            <a:schemeClr val="accent1"/>
+          </a:fillRef>
+          <a:effectRef idx="2">
+            <a:schemeClr val="accent1"/>
+          </a:effectRef>
+          <a:fontRef idx="minor">
+            <a:schemeClr val="lt1"/>
+          </a:fontRef>
+        </p:style>
+        <p:txBody>
+          <a:bodyPr rtlCol="0" anchor="ctr"/>
+          <a:lstStyle/>
+          <a:p>
+            <a:pPr algn="ctr"/>
+          </a:p>
+        </p:txBody>
+      </p:sp>
+      <p:sp>
+        <p:nvSpPr>
+          <p:cNvPr id="9" name="Oval 8"/>
+          <p:cNvSpPr/>
+          <p:nvPr/>
+        </p:nvSpPr>
+        <p:spPr>
+          <a:xfrm>
+            <a:off x="2040940" y="1481328"/>
+            <a:ext cx="530352" cy="530352"/>
+          </a:xfrm>
+          <a:prstGeom prst="ellipse">
             <a:avLst/>
           </a:prstGeom>
           <a:solidFill>
@@ -6791,227 +6879,7 @@
       </p:sp>
       <p:sp>
         <p:nvSpPr>
-          <p:cNvPr id="8" name="Rectangle 7"/>
-          <p:cNvSpPr/>
-          <p:nvPr/>
-        </p:nvSpPr>
-        <p:spPr>
-          <a:xfrm>
-            <a:off x="5096865" y="1730959"/>
-            <a:ext cx="1995220" cy="31089"/>
-          </a:xfrm>
-          <a:prstGeom prst="rect">
-            <a:avLst/>
-          </a:prstGeom>
-          <a:solidFill>
-            <a:srgbClr val="14B8A6"/>
-          </a:solidFill>
-          <a:ln>
-            <a:noFill/>
-          </a:ln>
-          <a:effectLst/>
-        </p:spPr>
-        <p:style>
-          <a:lnRef idx="1">
-            <a:schemeClr val="accent1"/>
-          </a:lnRef>
-          <a:fillRef idx="3">
-            <a:schemeClr val="accent1"/>
-          </a:fillRef>
-          <a:effectRef idx="2">
-            <a:schemeClr val="accent1"/>
-          </a:effectRef>
-          <a:fontRef idx="minor">
-            <a:schemeClr val="lt1"/>
-          </a:fontRef>
-        </p:style>
-        <p:txBody>
-          <a:bodyPr rtlCol="0" anchor="ctr"/>
-          <a:lstStyle/>
-          <a:p>
-            <a:pPr algn="ctr"/>
-          </a:p>
-        </p:txBody>
-      </p:sp>
-      <p:sp>
-        <p:nvSpPr>
-          <p:cNvPr id="9" name="Isosceles Triangle 8"/>
-          <p:cNvSpPr/>
-          <p:nvPr/>
-        </p:nvSpPr>
-        <p:spPr>
-          <a:xfrm rot="5400000">
-            <a:off x="6021324" y="1673352"/>
-            <a:ext cx="146304" cy="146304"/>
-          </a:xfrm>
-          <a:prstGeom prst="triangle">
-            <a:avLst/>
-          </a:prstGeom>
-          <a:solidFill>
-            <a:srgbClr val="0D9488"/>
-          </a:solidFill>
-          <a:ln>
-            <a:noFill/>
-          </a:ln>
-          <a:effectLst/>
-        </p:spPr>
-        <p:style>
-          <a:lnRef idx="1">
-            <a:schemeClr val="accent1"/>
-          </a:lnRef>
-          <a:fillRef idx="3">
-            <a:schemeClr val="accent1"/>
-          </a:fillRef>
-          <a:effectRef idx="2">
-            <a:schemeClr val="accent1"/>
-          </a:effectRef>
-          <a:fontRef idx="minor">
-            <a:schemeClr val="lt1"/>
-          </a:fontRef>
-        </p:style>
-        <p:txBody>
-          <a:bodyPr rtlCol="0" anchor="ctr"/>
-          <a:lstStyle/>
-          <a:p>
-            <a:pPr algn="ctr"/>
-          </a:p>
-        </p:txBody>
-      </p:sp>
-      <p:sp>
-        <p:nvSpPr>
-          <p:cNvPr id="10" name="Rectangle 9"/>
-          <p:cNvSpPr/>
-          <p:nvPr/>
-        </p:nvSpPr>
-        <p:spPr>
-          <a:xfrm>
-            <a:off x="7622438" y="1730959"/>
-            <a:ext cx="1995220" cy="31089"/>
-          </a:xfrm>
-          <a:prstGeom prst="rect">
-            <a:avLst/>
-          </a:prstGeom>
-          <a:solidFill>
-            <a:srgbClr val="14B8A6"/>
-          </a:solidFill>
-          <a:ln>
-            <a:noFill/>
-          </a:ln>
-          <a:effectLst/>
-        </p:spPr>
-        <p:style>
-          <a:lnRef idx="1">
-            <a:schemeClr val="accent1"/>
-          </a:lnRef>
-          <a:fillRef idx="3">
-            <a:schemeClr val="accent1"/>
-          </a:fillRef>
-          <a:effectRef idx="2">
-            <a:schemeClr val="accent1"/>
-          </a:effectRef>
-          <a:fontRef idx="minor">
-            <a:schemeClr val="lt1"/>
-          </a:fontRef>
-        </p:style>
-        <p:txBody>
-          <a:bodyPr rtlCol="0" anchor="ctr"/>
-          <a:lstStyle/>
-          <a:p>
-            <a:pPr algn="ctr"/>
-          </a:p>
-        </p:txBody>
-      </p:sp>
-      <p:sp>
-        <p:nvSpPr>
-          <p:cNvPr id="11" name="Isosceles Triangle 10"/>
-          <p:cNvSpPr/>
-          <p:nvPr/>
-        </p:nvSpPr>
-        <p:spPr>
-          <a:xfrm rot="5400000">
-            <a:off x="8546896" y="1673352"/>
-            <a:ext cx="146304" cy="146304"/>
-          </a:xfrm>
-          <a:prstGeom prst="triangle">
-            <a:avLst/>
-          </a:prstGeom>
-          <a:solidFill>
-            <a:srgbClr val="0D9488"/>
-          </a:solidFill>
-          <a:ln>
-            <a:noFill/>
-          </a:ln>
-          <a:effectLst/>
-        </p:spPr>
-        <p:style>
-          <a:lnRef idx="1">
-            <a:schemeClr val="accent1"/>
-          </a:lnRef>
-          <a:fillRef idx="3">
-            <a:schemeClr val="accent1"/>
-          </a:fillRef>
-          <a:effectRef idx="2">
-            <a:schemeClr val="accent1"/>
-          </a:effectRef>
-          <a:fontRef idx="minor">
-            <a:schemeClr val="lt1"/>
-          </a:fontRef>
-        </p:style>
-        <p:txBody>
-          <a:bodyPr rtlCol="0" anchor="ctr"/>
-          <a:lstStyle/>
-          <a:p>
-            <a:pPr algn="ctr"/>
-          </a:p>
-        </p:txBody>
-      </p:sp>
-      <p:sp>
-        <p:nvSpPr>
-          <p:cNvPr id="12" name="Oval 11"/>
-          <p:cNvSpPr/>
-          <p:nvPr/>
-        </p:nvSpPr>
-        <p:spPr>
-          <a:xfrm>
-            <a:off x="2040940" y="1481328"/>
-            <a:ext cx="530352" cy="530352"/>
-          </a:xfrm>
-          <a:prstGeom prst="ellipse">
-            <a:avLst/>
-          </a:prstGeom>
-          <a:solidFill>
-            <a:srgbClr val="0D9488"/>
-          </a:solidFill>
-          <a:ln>
-            <a:noFill/>
-          </a:ln>
-          <a:effectLst/>
-        </p:spPr>
-        <p:style>
-          <a:lnRef idx="1">
-            <a:schemeClr val="accent1"/>
-          </a:lnRef>
-          <a:fillRef idx="3">
-            <a:schemeClr val="accent1"/>
-          </a:fillRef>
-          <a:effectRef idx="2">
-            <a:schemeClr val="accent1"/>
-          </a:effectRef>
-          <a:fontRef idx="minor">
-            <a:schemeClr val="lt1"/>
-          </a:fontRef>
-        </p:style>
-        <p:txBody>
-          <a:bodyPr rtlCol="0" anchor="ctr"/>
-          <a:lstStyle/>
-          <a:p>
-            <a:pPr algn="ctr"/>
-          </a:p>
-        </p:txBody>
-      </p:sp>
-      <p:sp>
-        <p:nvSpPr>
-          <p:cNvPr id="13" name="TextBox 12"/>
+          <p:cNvPr id="10" name="TextBox 9"/>
           <p:cNvSpPr txBox="1"/>
           <p:nvPr/>
         </p:nvSpPr>
@@ -7046,7 +6914,7 @@
       </p:sp>
       <p:sp>
         <p:nvSpPr>
-          <p:cNvPr id="14" name="Rounded Rectangle 13"/>
+          <p:cNvPr id="11" name="Rounded Rectangle 10"/>
           <p:cNvSpPr/>
           <p:nvPr/>
         </p:nvSpPr>
@@ -7094,7 +6962,7 @@
       </p:sp>
       <p:sp>
         <p:nvSpPr>
-          <p:cNvPr id="15" name="TextBox 14"/>
+          <p:cNvPr id="12" name="TextBox 11"/>
           <p:cNvSpPr txBox="1"/>
           <p:nvPr/>
         </p:nvSpPr>
@@ -7129,7 +6997,7 @@
       </p:sp>
       <p:sp>
         <p:nvSpPr>
-          <p:cNvPr id="16" name="TextBox 15"/>
+          <p:cNvPr id="13" name="TextBox 12"/>
           <p:cNvSpPr txBox="1"/>
           <p:nvPr/>
         </p:nvSpPr>
@@ -7168,7 +7036,7 @@
       </p:sp>
       <p:sp>
         <p:nvSpPr>
-          <p:cNvPr id="17" name="Oval 16"/>
+          <p:cNvPr id="14" name="Oval 13"/>
           <p:cNvSpPr/>
           <p:nvPr/>
         </p:nvSpPr>
@@ -7212,7 +7080,7 @@
       </p:sp>
       <p:sp>
         <p:nvSpPr>
-          <p:cNvPr id="18" name="TextBox 17"/>
+          <p:cNvPr id="15" name="TextBox 14"/>
           <p:cNvSpPr txBox="1"/>
           <p:nvPr/>
         </p:nvSpPr>
@@ -7247,7 +7115,7 @@
       </p:sp>
       <p:sp>
         <p:nvSpPr>
-          <p:cNvPr id="19" name="Rounded Rectangle 18"/>
+          <p:cNvPr id="16" name="Rounded Rectangle 15"/>
           <p:cNvSpPr/>
           <p:nvPr/>
         </p:nvSpPr>
@@ -7295,7 +7163,7 @@
       </p:sp>
       <p:sp>
         <p:nvSpPr>
-          <p:cNvPr id="20" name="TextBox 19"/>
+          <p:cNvPr id="17" name="TextBox 16"/>
           <p:cNvSpPr txBox="1"/>
           <p:nvPr/>
         </p:nvSpPr>
@@ -7330,7 +7198,7 @@
       </p:sp>
       <p:sp>
         <p:nvSpPr>
-          <p:cNvPr id="21" name="TextBox 20"/>
+          <p:cNvPr id="18" name="TextBox 17"/>
           <p:cNvSpPr txBox="1"/>
           <p:nvPr/>
         </p:nvSpPr>
@@ -7369,7 +7237,7 @@
       </p:sp>
       <p:sp>
         <p:nvSpPr>
-          <p:cNvPr id="22" name="Oval 21"/>
+          <p:cNvPr id="19" name="Oval 18"/>
           <p:cNvSpPr/>
           <p:nvPr/>
         </p:nvSpPr>
@@ -7413,7 +7281,7 @@
       </p:sp>
       <p:sp>
         <p:nvSpPr>
-          <p:cNvPr id="23" name="TextBox 22"/>
+          <p:cNvPr id="20" name="TextBox 19"/>
           <p:cNvSpPr txBox="1"/>
           <p:nvPr/>
         </p:nvSpPr>
@@ -7448,7 +7316,7 @@
       </p:sp>
       <p:sp>
         <p:nvSpPr>
-          <p:cNvPr id="24" name="Rounded Rectangle 23"/>
+          <p:cNvPr id="21" name="Rounded Rectangle 20"/>
           <p:cNvSpPr/>
           <p:nvPr/>
         </p:nvSpPr>
@@ -7496,7 +7364,7 @@
       </p:sp>
       <p:sp>
         <p:nvSpPr>
-          <p:cNvPr id="25" name="TextBox 24"/>
+          <p:cNvPr id="22" name="TextBox 21"/>
           <p:cNvSpPr txBox="1"/>
           <p:nvPr/>
         </p:nvSpPr>
@@ -7531,7 +7399,7 @@
       </p:sp>
       <p:sp>
         <p:nvSpPr>
-          <p:cNvPr id="26" name="TextBox 25"/>
+          <p:cNvPr id="23" name="TextBox 22"/>
           <p:cNvSpPr txBox="1"/>
           <p:nvPr/>
         </p:nvSpPr>
@@ -7570,7 +7438,7 @@
       </p:sp>
       <p:sp>
         <p:nvSpPr>
-          <p:cNvPr id="27" name="Oval 26"/>
+          <p:cNvPr id="24" name="Oval 23"/>
           <p:cNvSpPr/>
           <p:nvPr/>
         </p:nvSpPr>
@@ -7614,7 +7482,7 @@
       </p:sp>
       <p:sp>
         <p:nvSpPr>
-          <p:cNvPr id="28" name="TextBox 27"/>
+          <p:cNvPr id="25" name="TextBox 24"/>
           <p:cNvSpPr txBox="1"/>
           <p:nvPr/>
         </p:nvSpPr>
@@ -7649,7 +7517,7 @@
       </p:sp>
       <p:sp>
         <p:nvSpPr>
-          <p:cNvPr id="29" name="Rounded Rectangle 28"/>
+          <p:cNvPr id="26" name="Rounded Rectangle 25"/>
           <p:cNvSpPr/>
           <p:nvPr/>
         </p:nvSpPr>
@@ -7697,7 +7565,7 @@
       </p:sp>
       <p:sp>
         <p:nvSpPr>
-          <p:cNvPr id="30" name="TextBox 29"/>
+          <p:cNvPr id="27" name="TextBox 26"/>
           <p:cNvSpPr txBox="1"/>
           <p:nvPr/>
         </p:nvSpPr>
@@ -7732,7 +7600,7 @@
       </p:sp>
       <p:sp>
         <p:nvSpPr>
-          <p:cNvPr id="31" name="TextBox 30"/>
+          <p:cNvPr id="28" name="TextBox 27"/>
           <p:cNvSpPr txBox="1"/>
           <p:nvPr/>
         </p:nvSpPr>
@@ -7771,7 +7639,7 @@
       </p:sp>
       <p:sp>
         <p:nvSpPr>
-          <p:cNvPr id="32" name="TextBox 31"/>
+          <p:cNvPr id="29" name="TextBox 28"/>
           <p:cNvSpPr txBox="1"/>
           <p:nvPr/>
         </p:nvSpPr>
@@ -7806,7 +7674,7 @@
       </p:sp>
       <p:sp>
         <p:nvSpPr>
-          <p:cNvPr id="33" name="TextBox 32"/>
+          <p:cNvPr id="30" name="TextBox 29"/>
           <p:cNvSpPr txBox="1"/>
           <p:nvPr/>
         </p:nvSpPr>
@@ -7841,7 +7709,7 @@
       </p:sp>
       <p:sp>
         <p:nvSpPr>
-          <p:cNvPr id="34" name="Rectangle 33"/>
+          <p:cNvPr id="31" name="Rectangle 30"/>
           <p:cNvSpPr/>
           <p:nvPr/>
         </p:nvSpPr>
@@ -8365,7 +8233,7 @@
           <a:p>
             <a:pPr>
               <a:lnSpc>
-                <a:spcPct val="115000"/>
+                <a:spcPct val="149500"/>
               </a:lnSpc>
             </a:pPr>
             <a:r>
@@ -8390,7 +8258,7 @@
           <a:p>
             <a:pPr>
               <a:lnSpc>
-                <a:spcPct val="115000"/>
+                <a:spcPct val="149500"/>
               </a:lnSpc>
             </a:pPr>
             <a:r>
@@ -8415,7 +8283,7 @@
           <a:p>
             <a:pPr>
               <a:lnSpc>
-                <a:spcPct val="115000"/>
+                <a:spcPct val="149500"/>
               </a:lnSpc>
             </a:pPr>
             <a:r>
@@ -9149,7 +9017,7 @@
           <a:p>
             <a:pPr>
               <a:lnSpc>
-                <a:spcPct val="115000"/>
+                <a:spcPct val="149500"/>
               </a:lnSpc>
             </a:pPr>
             <a:r>
@@ -9174,7 +9042,7 @@
           <a:p>
             <a:pPr>
               <a:lnSpc>
-                <a:spcPct val="115000"/>
+                <a:spcPct val="149500"/>
               </a:lnSpc>
             </a:pPr>
             <a:r>
@@ -9199,7 +9067,7 @@
           <a:p>
             <a:pPr>
               <a:lnSpc>
-                <a:spcPct val="115000"/>
+                <a:spcPct val="149500"/>
               </a:lnSpc>
             </a:pPr>
             <a:r>
@@ -9783,7 +9651,7 @@
           <a:p>
             <a:pPr>
               <a:lnSpc>
-                <a:spcPct val="115000"/>
+                <a:spcPct val="149500"/>
               </a:lnSpc>
             </a:pPr>
             <a:r>
@@ -9808,7 +9676,7 @@
           <a:p>
             <a:pPr>
               <a:lnSpc>
-                <a:spcPct val="115000"/>
+                <a:spcPct val="149500"/>
               </a:lnSpc>
             </a:pPr>
             <a:r>
@@ -9833,7 +9701,7 @@
           <a:p>
             <a:pPr>
               <a:lnSpc>
-                <a:spcPct val="115000"/>
+                <a:spcPct val="149500"/>
               </a:lnSpc>
             </a:pPr>
             <a:r>
@@ -10224,7 +10092,7 @@
           <a:p>
             <a:pPr>
               <a:lnSpc>
-                <a:spcPct val="115000"/>
+                <a:spcPct val="149500"/>
               </a:lnSpc>
             </a:pPr>
             <a:r>
@@ -10249,7 +10117,7 @@
           <a:p>
             <a:pPr>
               <a:lnSpc>
-                <a:spcPct val="115000"/>
+                <a:spcPct val="149500"/>
               </a:lnSpc>
             </a:pPr>
             <a:r>
@@ -10274,7 +10142,7 @@
           <a:p>
             <a:pPr>
               <a:lnSpc>
-                <a:spcPct val="115000"/>
+                <a:spcPct val="149500"/>
               </a:lnSpc>
             </a:pPr>
             <a:r>

--- a/class/cloud_infra_mgmt/05주차_Kubernetes핵심1/01_강의자료/3차시_Endpoints와라운드로빈.pptx
+++ b/class/cloud_infra_mgmt/05주차_Kubernetes핵심1/01_강의자료/3차시_Endpoints와라운드로빈.pptx
@@ -4825,6 +4825,8 @@
                   <a:srgbClr val="14B8A6"/>
                 </a:solidFill>
                 <a:latin typeface="맑은 고딕"/>
+                <a:ea typeface="맑은 고딕"/>
+                <a:cs typeface="맑은 고딕"/>
               </a:rPr>
               <a:t>클라우드인프라관리  ·  5주차 3차시</a:t>
             </a:r>
@@ -4860,6 +4862,8 @@
                   <a:srgbClr val="FFFFFF"/>
                 </a:solidFill>
                 <a:latin typeface="맑은 고딕"/>
+                <a:ea typeface="맑은 고딕"/>
+                <a:cs typeface="맑은 고딕"/>
               </a:rPr>
               <a:t>Endpoints와 라운드로빈</a:t>
             </a:r>
@@ -4895,6 +4899,8 @@
                   <a:srgbClr val="C9D3E6"/>
                 </a:solidFill>
                 <a:latin typeface="맑은 고딕"/>
+                <a:ea typeface="맑은 고딕"/>
+                <a:cs typeface="맑은 고딕"/>
               </a:rPr>
               <a:t>Service가 실제로 연결된 Pod 확인하기</a:t>
             </a:r>
@@ -4930,6 +4936,8 @@
                   <a:srgbClr val="FFFFFF"/>
                 </a:solidFill>
                 <a:latin typeface="맑은 고딕"/>
+                <a:ea typeface="맑은 고딕"/>
+                <a:cs typeface="맑은 고딕"/>
               </a:rPr>
               <a:t>영남이공대학교 김지윤교수</a:t>
             </a:r>
@@ -5089,6 +5097,8 @@
                   <a:srgbClr val="14213D"/>
                 </a:solidFill>
                 <a:latin typeface="맑은 고딕"/>
+                <a:ea typeface="맑은 고딕"/>
+                <a:cs typeface="맑은 고딕"/>
               </a:rPr>
               <a:t>03</a:t>
             </a:r>
@@ -5124,6 +5134,8 @@
                   <a:srgbClr val="14B8A6"/>
                 </a:solidFill>
                 <a:latin typeface="맑은 고딕"/>
+                <a:ea typeface="맑은 고딕"/>
+                <a:cs typeface="맑은 고딕"/>
               </a:rPr>
               <a:t>실습 안내</a:t>
             </a:r>
@@ -5159,6 +5171,8 @@
                   <a:srgbClr val="FFFFFF"/>
                 </a:solidFill>
                 <a:latin typeface="맑은 고딕"/>
+                <a:ea typeface="맑은 고딕"/>
+                <a:cs typeface="맑은 고딕"/>
               </a:rPr>
               <a:t>VM 과제 제출 — 5주차 마무리</a:t>
             </a:r>
@@ -5198,6 +5212,8 @@
                   <a:srgbClr val="0D9488"/>
                 </a:solidFill>
                 <a:latin typeface="맑은 고딕"/>
+                <a:ea typeface="맑은 고딕"/>
+                <a:cs typeface="맑은 고딕"/>
               </a:rPr>
               <a:t>●  </a:t>
             </a:r>
@@ -5207,6 +5223,8 @@
                   <a:srgbClr val="222733"/>
                 </a:solidFill>
                 <a:latin typeface="맑은 고딕"/>
+                <a:ea typeface="맑은 고딕"/>
+                <a:cs typeface="맑은 고딕"/>
               </a:rPr>
               <a:t>개인 VM에서 kubectl get endpoints myapp 캡처</a:t>
             </a:r>
@@ -5223,6 +5241,8 @@
                   <a:srgbClr val="0D9488"/>
                 </a:solidFill>
                 <a:latin typeface="맑은 고딕"/>
+                <a:ea typeface="맑은 고딕"/>
+                <a:cs typeface="맑은 고딕"/>
               </a:rPr>
               <a:t>●  </a:t>
             </a:r>
@@ -5232,6 +5252,8 @@
                   <a:srgbClr val="222733"/>
                 </a:solidFill>
                 <a:latin typeface="맑은 고딕"/>
+                <a:ea typeface="맑은 고딕"/>
+                <a:cs typeface="맑은 고딕"/>
               </a:rPr>
               <a:t>반복 curl 실행 결과 캡처</a:t>
             </a:r>
@@ -5248,6 +5270,8 @@
                   <a:srgbClr val="0D9488"/>
                 </a:solidFill>
                 <a:latin typeface="맑은 고딕"/>
+                <a:ea typeface="맑은 고딕"/>
+                <a:cs typeface="맑은 고딕"/>
               </a:rPr>
               <a:t>●  </a:t>
             </a:r>
@@ -5257,6 +5281,8 @@
                   <a:srgbClr val="222733"/>
                 </a:solidFill>
                 <a:latin typeface="맑은 고딕"/>
+                <a:ea typeface="맑은 고딕"/>
+                <a:cs typeface="맑은 고딕"/>
               </a:rPr>
               <a:t>5주차 1~3차시 실습을 종합해서 LMS 과제 게시판에 제출</a:t>
             </a:r>
@@ -5292,6 +5318,8 @@
                   <a:srgbClr val="5B6373"/>
                 </a:solidFill>
                 <a:latin typeface="맑은 고딕"/>
+                <a:ea typeface="맑은 고딕"/>
+                <a:cs typeface="맑은 고딕"/>
               </a:rPr>
               <a:t>클라우드인프라관리  ·  5주차 3차시</a:t>
             </a:r>
@@ -5327,6 +5355,8 @@
                   <a:srgbClr val="5B6373"/>
                 </a:solidFill>
                 <a:latin typeface="맑은 고딕"/>
+                <a:ea typeface="맑은 고딕"/>
+                <a:cs typeface="맑은 고딕"/>
               </a:rPr>
               <a:t>10 / 12</a:t>
             </a:r>
@@ -5512,6 +5542,8 @@
                   <a:srgbClr val="FFFFFF"/>
                 </a:solidFill>
                 <a:latin typeface="맑은 고딕"/>
+                <a:ea typeface="맑은 고딕"/>
+                <a:cs typeface="맑은 고딕"/>
               </a:rPr>
               <a:t>오늘의 정리</a:t>
             </a:r>
@@ -5565,6 +5597,8 @@
                   <a:srgbClr val="14213D"/>
                 </a:solidFill>
                 <a:latin typeface="맑은 고딕"/>
+                <a:ea typeface="맑은 고딕"/>
+                <a:cs typeface="맑은 고딕"/>
               </a:rPr>
               <a:t>1</a:t>
             </a:r>
@@ -5600,6 +5634,8 @@
                   <a:srgbClr val="FFFFFF"/>
                 </a:solidFill>
                 <a:latin typeface="맑은 고딕"/>
+                <a:ea typeface="맑은 고딕"/>
+                <a:cs typeface="맑은 고딕"/>
               </a:rPr>
               <a:t>Endpoints = Service 뒤에 실제로 연결된 Pod IP 목록</a:t>
             </a:r>
@@ -5653,6 +5689,8 @@
                   <a:srgbClr val="14213D"/>
                 </a:solidFill>
                 <a:latin typeface="맑은 고딕"/>
+                <a:ea typeface="맑은 고딕"/>
+                <a:cs typeface="맑은 고딕"/>
               </a:rPr>
               <a:t>2</a:t>
             </a:r>
@@ -5688,6 +5726,8 @@
                   <a:srgbClr val="FFFFFF"/>
                 </a:solidFill>
                 <a:latin typeface="맑은 고딕"/>
+                <a:ea typeface="맑은 고딕"/>
+                <a:cs typeface="맑은 고딕"/>
               </a:rPr>
               <a:t>Service는 여러 Pod에 요청을 라운드로빈으로 고르게 분산한다</a:t>
             </a:r>
@@ -5829,6 +5869,8 @@
                   <a:srgbClr val="FFFFFF"/>
                 </a:solidFill>
                 <a:latin typeface="맑은 고딕"/>
+                <a:ea typeface="맑은 고딕"/>
+                <a:cs typeface="맑은 고딕"/>
               </a:rPr>
               <a:t>다음 주 예고</a:t>
             </a:r>
@@ -5864,6 +5906,8 @@
                   <a:srgbClr val="14B8A6"/>
                 </a:solidFill>
                 <a:latin typeface="맑은 고딕"/>
+                <a:ea typeface="맑은 고딕"/>
+                <a:cs typeface="맑은 고딕"/>
               </a:rPr>
               <a:t>다음 차시 예고 — 6주차 — ConfigMap, Secret 및 PV/PVC 상태 관리</a:t>
             </a:r>
@@ -5899,6 +5943,8 @@
                   <a:srgbClr val="FFFFFF"/>
                 </a:solidFill>
                 <a:latin typeface="맑은 고딕"/>
+                <a:ea typeface="맑은 고딕"/>
+                <a:cs typeface="맑은 고딕"/>
               </a:rPr>
               <a:t>설정값과 비밀번호를 코드와 분리하는 ConfigMap·Secret, 그리고 데이터를 영구 저장하는 PV/PVC를 배웁니다.</a:t>
             </a:r>
@@ -6084,6 +6130,8 @@
                   <a:srgbClr val="14B8A6"/>
                 </a:solidFill>
                 <a:latin typeface="맑은 고딕"/>
+                <a:ea typeface="맑은 고딕"/>
+                <a:cs typeface="맑은 고딕"/>
               </a:rPr>
               <a:t>5주차를 마치며</a:t>
             </a:r>
@@ -6119,6 +6167,8 @@
                   <a:srgbClr val="FFFFFF"/>
                 </a:solidFill>
                 <a:latin typeface="맑은 고딕"/>
+                <a:ea typeface="맑은 고딕"/>
+                <a:cs typeface="맑은 고딕"/>
               </a:rPr>
               <a:t>수고하셨습니다!</a:t>
             </a:r>
@@ -6158,6 +6208,8 @@
                   <a:srgbClr val="C9D3E6"/>
                 </a:solidFill>
                 <a:latin typeface="맑은 고딕"/>
+                <a:ea typeface="맑은 고딕"/>
+                <a:cs typeface="맑은 고딕"/>
               </a:rPr>
               <a:t>Service 개념부터 라운드로빈 부하분산까지, K8s 네트워킹의 핵심을 직접 확인하셨습니다.</a:t>
             </a:r>
@@ -6299,6 +6351,8 @@
                   <a:srgbClr val="14B8A6"/>
                 </a:solidFill>
                 <a:latin typeface="맑은 고딕"/>
+                <a:ea typeface="맑은 고딕"/>
+                <a:cs typeface="맑은 고딕"/>
               </a:rPr>
               <a:t>SESSION OVERVIEW</a:t>
             </a:r>
@@ -6334,6 +6388,8 @@
                   <a:srgbClr val="FFFFFF"/>
                 </a:solidFill>
                 <a:latin typeface="맑은 고딕"/>
+                <a:ea typeface="맑은 고딕"/>
+                <a:cs typeface="맑은 고딕"/>
               </a:rPr>
               <a:t>오늘의 학습 목표</a:t>
             </a:r>
@@ -6373,6 +6429,8 @@
                   <a:srgbClr val="222733"/>
                 </a:solidFill>
                 <a:latin typeface="맑은 고딕"/>
+                <a:ea typeface="맑은 고딕"/>
+                <a:cs typeface="맑은 고딕"/>
               </a:rPr>
               <a:t>1.  Endpoints가 무엇인지 이해한다</a:t>
             </a:r>
@@ -6389,6 +6447,8 @@
                   <a:srgbClr val="222733"/>
                 </a:solidFill>
                 <a:latin typeface="맑은 고딕"/>
+                <a:ea typeface="맑은 고딕"/>
+                <a:cs typeface="맑은 고딕"/>
               </a:rPr>
               <a:t>2.  Service가 여러 Pod에 트래픽을 어떻게 분산하는지 이해한다</a:t>
             </a:r>
@@ -6405,6 +6465,8 @@
                   <a:srgbClr val="222733"/>
                 </a:solidFill>
                 <a:latin typeface="맑은 고딕"/>
+                <a:ea typeface="맑은 고딕"/>
+                <a:cs typeface="맑은 고딕"/>
               </a:rPr>
               <a:t>3.  반복 요청으로 라운드로빈 분산을 직접 확인한다</a:t>
             </a:r>
@@ -6440,6 +6502,8 @@
                   <a:srgbClr val="5B6373"/>
                 </a:solidFill>
                 <a:latin typeface="맑은 고딕"/>
+                <a:ea typeface="맑은 고딕"/>
+                <a:cs typeface="맑은 고딕"/>
               </a:rPr>
               <a:t>클라우드인프라관리  ·  5주차 3차시</a:t>
             </a:r>
@@ -6475,6 +6539,8 @@
                   <a:srgbClr val="5B6373"/>
                 </a:solidFill>
                 <a:latin typeface="맑은 고딕"/>
+                <a:ea typeface="맑은 고딕"/>
+                <a:cs typeface="맑은 고딕"/>
               </a:rPr>
               <a:t>02 / 12</a:t>
             </a:r>
@@ -6660,6 +6726,8 @@
                   <a:srgbClr val="14B8A6"/>
                 </a:solidFill>
                 <a:latin typeface="맑은 고딕"/>
+                <a:ea typeface="맑은 고딕"/>
+                <a:cs typeface="맑은 고딕"/>
               </a:rPr>
               <a:t>SESSION OVERVIEW</a:t>
             </a:r>
@@ -6695,6 +6763,8 @@
                   <a:srgbClr val="FFFFFF"/>
                 </a:solidFill>
                 <a:latin typeface="맑은 고딕"/>
+                <a:ea typeface="맑은 고딕"/>
+                <a:cs typeface="맑은 고딕"/>
               </a:rPr>
               <a:t>오늘의 진행 순서</a:t>
             </a:r>
@@ -6906,6 +6976,8 @@
                   <a:srgbClr val="FFFFFF"/>
                 </a:solidFill>
                 <a:latin typeface="맑은 고딕"/>
+                <a:ea typeface="맑은 고딕"/>
+                <a:cs typeface="맑은 고딕"/>
               </a:rPr>
               <a:t>1</a:t>
             </a:r>
@@ -6989,6 +7061,8 @@
                   <a:srgbClr val="14213D"/>
                 </a:solidFill>
                 <a:latin typeface="맑은 고딕"/>
+                <a:ea typeface="맑은 고딕"/>
+                <a:cs typeface="맑은 고딕"/>
               </a:rPr>
               <a:t>개념 설명</a:t>
             </a:r>
@@ -7028,6 +7102,8 @@
                   <a:srgbClr val="222733"/>
                 </a:solidFill>
                 <a:latin typeface="맑은 고딕"/>
+                <a:ea typeface="맑은 고딕"/>
+                <a:cs typeface="맑은 고딕"/>
               </a:rPr>
               <a:t>강의자료 기반 직접 강의</a:t>
             </a:r>
@@ -7107,6 +7183,8 @@
                   <a:srgbClr val="FFFFFF"/>
                 </a:solidFill>
                 <a:latin typeface="맑은 고딕"/>
+                <a:ea typeface="맑은 고딕"/>
+                <a:cs typeface="맑은 고딕"/>
               </a:rPr>
               <a:t>2</a:t>
             </a:r>
@@ -7190,6 +7268,8 @@
                   <a:srgbClr val="14213D"/>
                 </a:solidFill>
                 <a:latin typeface="맑은 고딕"/>
+                <a:ea typeface="맑은 고딕"/>
+                <a:cs typeface="맑은 고딕"/>
               </a:rPr>
               <a:t>Killercoda</a:t>
             </a:r>
@@ -7229,6 +7309,8 @@
                   <a:srgbClr val="222733"/>
                 </a:solidFill>
                 <a:latin typeface="맑은 고딕"/>
+                <a:ea typeface="맑은 고딕"/>
+                <a:cs typeface="맑은 고딕"/>
               </a:rPr>
               <a:t>Endpoints·라운드로빈 확인</a:t>
             </a:r>
@@ -7308,6 +7390,8 @@
                   <a:srgbClr val="FFFFFF"/>
                 </a:solidFill>
                 <a:latin typeface="맑은 고딕"/>
+                <a:ea typeface="맑은 고딕"/>
+                <a:cs typeface="맑은 고딕"/>
               </a:rPr>
               <a:t>3</a:t>
             </a:r>
@@ -7391,6 +7475,8 @@
                   <a:srgbClr val="14213D"/>
                 </a:solidFill>
                 <a:latin typeface="맑은 고딕"/>
+                <a:ea typeface="맑은 고딕"/>
+                <a:cs typeface="맑은 고딕"/>
               </a:rPr>
               <a:t>VM 안내</a:t>
             </a:r>
@@ -7430,6 +7516,8 @@
                   <a:srgbClr val="222733"/>
                 </a:solidFill>
                 <a:latin typeface="맑은 고딕"/>
+                <a:ea typeface="맑은 고딕"/>
+                <a:cs typeface="맑은 고딕"/>
               </a:rPr>
               <a:t>VM 과제 제출</a:t>
             </a:r>
@@ -7509,6 +7597,8 @@
                   <a:srgbClr val="FFFFFF"/>
                 </a:solidFill>
                 <a:latin typeface="맑은 고딕"/>
+                <a:ea typeface="맑은 고딕"/>
+                <a:cs typeface="맑은 고딕"/>
               </a:rPr>
               <a:t>4</a:t>
             </a:r>
@@ -7592,6 +7682,8 @@
                   <a:srgbClr val="14213D"/>
                 </a:solidFill>
                 <a:latin typeface="맑은 고딕"/>
+                <a:ea typeface="맑은 고딕"/>
+                <a:cs typeface="맑은 고딕"/>
               </a:rPr>
               <a:t>결과 제출</a:t>
             </a:r>
@@ -7631,6 +7723,8 @@
                   <a:srgbClr val="222733"/>
                 </a:solidFill>
                 <a:latin typeface="맑은 고딕"/>
+                <a:ea typeface="맑은 고딕"/>
+                <a:cs typeface="맑은 고딕"/>
               </a:rPr>
               <a:t>체크리스트 제출</a:t>
             </a:r>
@@ -7666,6 +7760,8 @@
                   <a:srgbClr val="5B6373"/>
                 </a:solidFill>
                 <a:latin typeface="맑은 고딕"/>
+                <a:ea typeface="맑은 고딕"/>
+                <a:cs typeface="맑은 고딕"/>
               </a:rPr>
               <a:t>클라우드인프라관리  ·  5주차 3차시</a:t>
             </a:r>
@@ -7701,6 +7797,8 @@
                   <a:srgbClr val="5B6373"/>
                 </a:solidFill>
                 <a:latin typeface="맑은 고딕"/>
+                <a:ea typeface="맑은 고딕"/>
+                <a:cs typeface="맑은 고딕"/>
               </a:rPr>
               <a:t>03 / 12</a:t>
             </a:r>
@@ -7904,6 +8002,8 @@
                   <a:srgbClr val="14213D"/>
                 </a:solidFill>
                 <a:latin typeface="맑은 고딕"/>
+                <a:ea typeface="맑은 고딕"/>
+                <a:cs typeface="맑은 고딕"/>
               </a:rPr>
               <a:t>PART 01</a:t>
             </a:r>
@@ -7939,6 +8039,8 @@
                   <a:srgbClr val="FFFFFF"/>
                 </a:solidFill>
                 <a:latin typeface="맑은 고딕"/>
+                <a:ea typeface="맑은 고딕"/>
+                <a:cs typeface="맑은 고딕"/>
               </a:rPr>
               <a:t>Endpoints란?</a:t>
             </a:r>
@@ -7974,6 +8076,8 @@
                   <a:srgbClr val="C9D3E6"/>
                 </a:solidFill>
                 <a:latin typeface="맑은 고딕"/>
+                <a:ea typeface="맑은 고딕"/>
+                <a:cs typeface="맑은 고딕"/>
               </a:rPr>
               <a:t>Service 뒤에 실제로 연결된 Pod 목록</a:t>
             </a:r>
@@ -8133,6 +8237,8 @@
                   <a:srgbClr val="14213D"/>
                 </a:solidFill>
                 <a:latin typeface="맑은 고딕"/>
+                <a:ea typeface="맑은 고딕"/>
+                <a:cs typeface="맑은 고딕"/>
               </a:rPr>
               <a:t>01</a:t>
             </a:r>
@@ -8168,6 +8274,8 @@
                   <a:srgbClr val="14B8A6"/>
                 </a:solidFill>
                 <a:latin typeface="맑은 고딕"/>
+                <a:ea typeface="맑은 고딕"/>
+                <a:cs typeface="맑은 고딕"/>
               </a:rPr>
               <a:t>PART 1 · Endpoints란?</a:t>
             </a:r>
@@ -8203,6 +8311,8 @@
                   <a:srgbClr val="FFFFFF"/>
                 </a:solidFill>
                 <a:latin typeface="맑은 고딕"/>
+                <a:ea typeface="맑은 고딕"/>
+                <a:cs typeface="맑은 고딕"/>
               </a:rPr>
               <a:t>Service의 '연결 장부'</a:t>
             </a:r>
@@ -8242,6 +8352,8 @@
                   <a:srgbClr val="0D9488"/>
                 </a:solidFill>
                 <a:latin typeface="맑은 고딕"/>
+                <a:ea typeface="맑은 고딕"/>
+                <a:cs typeface="맑은 고딕"/>
               </a:rPr>
               <a:t>●  </a:t>
             </a:r>
@@ -8251,6 +8363,8 @@
                   <a:srgbClr val="222733"/>
                 </a:solidFill>
                 <a:latin typeface="맑은 고딕"/>
+                <a:ea typeface="맑은 고딕"/>
+                <a:cs typeface="맑은 고딕"/>
               </a:rPr>
               <a:t>Service는 라벨로 Pod를 찾는다고 배웠음 (1차시)</a:t>
             </a:r>
@@ -8267,6 +8381,8 @@
                   <a:srgbClr val="0D9488"/>
                 </a:solidFill>
                 <a:latin typeface="맑은 고딕"/>
+                <a:ea typeface="맑은 고딕"/>
+                <a:cs typeface="맑은 고딕"/>
               </a:rPr>
               <a:t>●  </a:t>
             </a:r>
@@ -8276,6 +8392,8 @@
                   <a:srgbClr val="222733"/>
                 </a:solidFill>
                 <a:latin typeface="맑은 고딕"/>
+                <a:ea typeface="맑은 고딕"/>
+                <a:cs typeface="맑은 고딕"/>
               </a:rPr>
               <a:t>그 결과 실제로 연결된 Pod들의 IP 목록이 Endpoints</a:t>
             </a:r>
@@ -8292,6 +8410,8 @@
                   <a:srgbClr val="0D9488"/>
                 </a:solidFill>
                 <a:latin typeface="맑은 고딕"/>
+                <a:ea typeface="맑은 고딕"/>
+                <a:cs typeface="맑은 고딕"/>
               </a:rPr>
               <a:t>●  </a:t>
             </a:r>
@@ -8301,6 +8421,8 @@
                   <a:srgbClr val="222733"/>
                 </a:solidFill>
                 <a:latin typeface="맑은 고딕"/>
+                <a:ea typeface="맑은 고딕"/>
+                <a:cs typeface="맑은 고딕"/>
               </a:rPr>
               <a:t>Pod가 추가·삭제될 때마다 Endpoints도 자동으로 갱신됨</a:t>
             </a:r>
@@ -8380,6 +8502,8 @@
                   <a:srgbClr val="FFFFFF"/>
                 </a:solidFill>
                 <a:latin typeface="맑은 고딕"/>
+                <a:ea typeface="맑은 고딕"/>
+                <a:cs typeface="맑은 고딕"/>
               </a:rPr>
               <a:t>🔍  확인 명령어</a:t>
             </a:r>
@@ -8415,6 +8539,8 @@
                   <a:srgbClr val="FFFFFF"/>
                 </a:solidFill>
                 <a:latin typeface="맑은 고딕"/>
+                <a:ea typeface="맑은 고딕"/>
+                <a:cs typeface="맑은 고딕"/>
               </a:rPr>
               <a:t>kubectl get endpoints {서비스이름} — 지금 이 순간 연결된 Pod IP 목록을 그대로 보여줌</a:t>
             </a:r>
@@ -8450,6 +8576,8 @@
                   <a:srgbClr val="5B6373"/>
                 </a:solidFill>
                 <a:latin typeface="맑은 고딕"/>
+                <a:ea typeface="맑은 고딕"/>
+                <a:cs typeface="맑은 고딕"/>
               </a:rPr>
               <a:t>클라우드인프라관리  ·  5주차 3차시</a:t>
             </a:r>
@@ -8485,6 +8613,8 @@
                   <a:srgbClr val="5B6373"/>
                 </a:solidFill>
                 <a:latin typeface="맑은 고딕"/>
+                <a:ea typeface="맑은 고딕"/>
+                <a:cs typeface="맑은 고딕"/>
               </a:rPr>
               <a:t>05 / 12</a:t>
             </a:r>
@@ -8688,6 +8818,8 @@
                   <a:srgbClr val="14213D"/>
                 </a:solidFill>
                 <a:latin typeface="맑은 고딕"/>
+                <a:ea typeface="맑은 고딕"/>
+                <a:cs typeface="맑은 고딕"/>
               </a:rPr>
               <a:t>PART 02</a:t>
             </a:r>
@@ -8723,6 +8855,8 @@
                   <a:srgbClr val="FFFFFF"/>
                 </a:solidFill>
                 <a:latin typeface="맑은 고딕"/>
+                <a:ea typeface="맑은 고딕"/>
+                <a:cs typeface="맑은 고딕"/>
               </a:rPr>
               <a:t>라운드로빈 부하분산</a:t>
             </a:r>
@@ -8758,6 +8892,8 @@
                   <a:srgbClr val="C9D3E6"/>
                 </a:solidFill>
                 <a:latin typeface="맑은 고딕"/>
+                <a:ea typeface="맑은 고딕"/>
+                <a:cs typeface="맑은 고딕"/>
               </a:rPr>
               <a:t>여러 Pod에 트래픽을 고르게</a:t>
             </a:r>
@@ -8917,6 +9053,8 @@
                   <a:srgbClr val="14213D"/>
                 </a:solidFill>
                 <a:latin typeface="맑은 고딕"/>
+                <a:ea typeface="맑은 고딕"/>
+                <a:cs typeface="맑은 고딕"/>
               </a:rPr>
               <a:t>02</a:t>
             </a:r>
@@ -8952,6 +9090,8 @@
                   <a:srgbClr val="14B8A6"/>
                 </a:solidFill>
                 <a:latin typeface="맑은 고딕"/>
+                <a:ea typeface="맑은 고딕"/>
+                <a:cs typeface="맑은 고딕"/>
               </a:rPr>
               <a:t>PART 2 · 라운드로빈 부하분산</a:t>
             </a:r>
@@ -8987,6 +9127,8 @@
                   <a:srgbClr val="FFFFFF"/>
                 </a:solidFill>
                 <a:latin typeface="맑은 고딕"/>
+                <a:ea typeface="맑은 고딕"/>
+                <a:cs typeface="맑은 고딕"/>
               </a:rPr>
               <a:t>요청이 순서대로 나뉜다</a:t>
             </a:r>
@@ -9026,6 +9168,8 @@
                   <a:srgbClr val="0D9488"/>
                 </a:solidFill>
                 <a:latin typeface="맑은 고딕"/>
+                <a:ea typeface="맑은 고딕"/>
+                <a:cs typeface="맑은 고딕"/>
               </a:rPr>
               <a:t>●  </a:t>
             </a:r>
@@ -9035,6 +9179,8 @@
                   <a:srgbClr val="222733"/>
                 </a:solidFill>
                 <a:latin typeface="맑은 고딕"/>
+                <a:ea typeface="맑은 고딕"/>
+                <a:cs typeface="맑은 고딕"/>
               </a:rPr>
               <a:t>Service로 요청이 여러 번 오면, 뒤의 Pod들에 순서대로 돌아가며 전달</a:t>
             </a:r>
@@ -9051,6 +9197,8 @@
                   <a:srgbClr val="0D9488"/>
                 </a:solidFill>
                 <a:latin typeface="맑은 고딕"/>
+                <a:ea typeface="맑은 고딕"/>
+                <a:cs typeface="맑은 고딕"/>
               </a:rPr>
               <a:t>●  </a:t>
             </a:r>
@@ -9060,6 +9208,8 @@
                   <a:srgbClr val="222733"/>
                 </a:solidFill>
                 <a:latin typeface="맑은 고딕"/>
+                <a:ea typeface="맑은 고딕"/>
+                <a:cs typeface="맑은 고딕"/>
               </a:rPr>
               <a:t>1번째 요청→Pod A, 2번째→Pod B, 3번째→Pod A, 4번째→Pod B ...</a:t>
             </a:r>
@@ -9076,6 +9226,8 @@
                   <a:srgbClr val="0D9488"/>
                 </a:solidFill>
                 <a:latin typeface="맑은 고딕"/>
+                <a:ea typeface="맑은 고딕"/>
+                <a:cs typeface="맑은 고딕"/>
               </a:rPr>
               <a:t>●  </a:t>
             </a:r>
@@ -9085,6 +9237,8 @@
                   <a:srgbClr val="222733"/>
                 </a:solidFill>
                 <a:latin typeface="맑은 고딕"/>
+                <a:ea typeface="맑은 고딕"/>
+                <a:cs typeface="맑은 고딕"/>
               </a:rPr>
               <a:t>이렇게 하면 특정 Pod 하나에만 부하가 몰리지 않음</a:t>
             </a:r>
@@ -9120,6 +9274,8 @@
                   <a:srgbClr val="14213D"/>
                 </a:solidFill>
                 <a:latin typeface="맑은 고딕"/>
+                <a:ea typeface="맑은 고딕"/>
+                <a:cs typeface="맑은 고딕"/>
               </a:rPr>
               <a:t>라운드로빈 예시 (Pod 2개)</a:t>
             </a:r>
@@ -9199,6 +9355,8 @@
                   <a:srgbClr val="FFFFFF"/>
                 </a:solidFill>
                 <a:latin typeface="맑은 고딕"/>
+                <a:ea typeface="맑은 고딕"/>
+                <a:cs typeface="맑은 고딕"/>
               </a:rPr>
               <a:t>요청 1,3,5... → Pod A</a:t>
             </a:r>
@@ -9278,6 +9436,8 @@
                   <a:srgbClr val="FFFFFF"/>
                 </a:solidFill>
                 <a:latin typeface="맑은 고딕"/>
+                <a:ea typeface="맑은 고딕"/>
+                <a:cs typeface="맑은 고딕"/>
               </a:rPr>
               <a:t>요청 2,4,6... → Pod B</a:t>
             </a:r>
@@ -9313,6 +9473,8 @@
                   <a:srgbClr val="5B6373"/>
                 </a:solidFill>
                 <a:latin typeface="맑은 고딕"/>
+                <a:ea typeface="맑은 고딕"/>
+                <a:cs typeface="맑은 고딕"/>
               </a:rPr>
               <a:t>클라우드인프라관리  ·  5주차 3차시</a:t>
             </a:r>
@@ -9348,6 +9510,8 @@
                   <a:srgbClr val="5B6373"/>
                 </a:solidFill>
                 <a:latin typeface="맑은 고딕"/>
+                <a:ea typeface="맑은 고딕"/>
+                <a:cs typeface="맑은 고딕"/>
               </a:rPr>
               <a:t>07 / 12</a:t>
             </a:r>
@@ -9551,6 +9715,8 @@
                   <a:srgbClr val="14213D"/>
                 </a:solidFill>
                 <a:latin typeface="맑은 고딕"/>
+                <a:ea typeface="맑은 고딕"/>
+                <a:cs typeface="맑은 고딕"/>
               </a:rPr>
               <a:t>02</a:t>
             </a:r>
@@ -9586,6 +9752,8 @@
                   <a:srgbClr val="14B8A6"/>
                 </a:solidFill>
                 <a:latin typeface="맑은 고딕"/>
+                <a:ea typeface="맑은 고딕"/>
+                <a:cs typeface="맑은 고딕"/>
               </a:rPr>
               <a:t>PART 2 · 라운드로빈 부하분산</a:t>
             </a:r>
@@ -9621,6 +9789,8 @@
                   <a:srgbClr val="FFFFFF"/>
                 </a:solidFill>
                 <a:latin typeface="맑은 고딕"/>
+                <a:ea typeface="맑은 고딕"/>
+                <a:cs typeface="맑은 고딕"/>
               </a:rPr>
               <a:t>직접 확인하는 방법</a:t>
             </a:r>
@@ -9660,6 +9830,8 @@
                   <a:srgbClr val="0D9488"/>
                 </a:solidFill>
                 <a:latin typeface="맑은 고딕"/>
+                <a:ea typeface="맑은 고딕"/>
+                <a:cs typeface="맑은 고딕"/>
               </a:rPr>
               <a:t>●  </a:t>
             </a:r>
@@ -9669,6 +9841,8 @@
                   <a:srgbClr val="222733"/>
                 </a:solidFill>
                 <a:latin typeface="맑은 고딕"/>
+                <a:ea typeface="맑은 고딕"/>
+                <a:cs typeface="맑은 고딕"/>
               </a:rPr>
               <a:t>for i in $(seq 1 10); do curl $(minikube service myapp --url); done</a:t>
             </a:r>
@@ -9685,6 +9859,8 @@
                   <a:srgbClr val="0D9488"/>
                 </a:solidFill>
                 <a:latin typeface="맑은 고딕"/>
+                <a:ea typeface="맑은 고딕"/>
+                <a:cs typeface="맑은 고딕"/>
               </a:rPr>
               <a:t>●  </a:t>
             </a:r>
@@ -9694,6 +9870,8 @@
                   <a:srgbClr val="222733"/>
                 </a:solidFill>
                 <a:latin typeface="맑은 고딕"/>
+                <a:ea typeface="맑은 고딕"/>
+                <a:cs typeface="맑은 고딕"/>
               </a:rPr>
               <a:t>curl을 10번 반복 요청</a:t>
             </a:r>
@@ -9710,6 +9888,8 @@
                   <a:srgbClr val="0D9488"/>
                 </a:solidFill>
                 <a:latin typeface="맑은 고딕"/>
+                <a:ea typeface="맑은 고딕"/>
+                <a:cs typeface="맑은 고딕"/>
               </a:rPr>
               <a:t>●  </a:t>
             </a:r>
@@ -9719,6 +9899,8 @@
                   <a:srgbClr val="222733"/>
                 </a:solidFill>
                 <a:latin typeface="맑은 고딕"/>
+                <a:ea typeface="맑은 고딕"/>
+                <a:cs typeface="맑은 고딕"/>
               </a:rPr>
               <a:t>매번 응답한 Pod의 hostname(컨테이너 ID)이 바뀌는지 관찰</a:t>
             </a:r>
@@ -9754,6 +9936,8 @@
                   <a:srgbClr val="5B6373"/>
                 </a:solidFill>
                 <a:latin typeface="맑은 고딕"/>
+                <a:ea typeface="맑은 고딕"/>
+                <a:cs typeface="맑은 고딕"/>
               </a:rPr>
               <a:t>클라우드인프라관리  ·  5주차 3차시</a:t>
             </a:r>
@@ -9789,6 +9973,8 @@
                   <a:srgbClr val="5B6373"/>
                 </a:solidFill>
                 <a:latin typeface="맑은 고딕"/>
+                <a:ea typeface="맑은 고딕"/>
+                <a:cs typeface="맑은 고딕"/>
               </a:rPr>
               <a:t>08 / 12</a:t>
             </a:r>
@@ -9992,6 +10178,8 @@
                   <a:srgbClr val="14213D"/>
                 </a:solidFill>
                 <a:latin typeface="맑은 고딕"/>
+                <a:ea typeface="맑은 고딕"/>
+                <a:cs typeface="맑은 고딕"/>
               </a:rPr>
               <a:t>03</a:t>
             </a:r>
@@ -10027,6 +10215,8 @@
                   <a:srgbClr val="14B8A6"/>
                 </a:solidFill>
                 <a:latin typeface="맑은 고딕"/>
+                <a:ea typeface="맑은 고딕"/>
+                <a:cs typeface="맑은 고딕"/>
               </a:rPr>
               <a:t>실습 안내</a:t>
             </a:r>
@@ -10062,6 +10252,8 @@
                   <a:srgbClr val="FFFFFF"/>
                 </a:solidFill>
                 <a:latin typeface="맑은 고딕"/>
+                <a:ea typeface="맑은 고딕"/>
+                <a:cs typeface="맑은 고딕"/>
               </a:rPr>
               <a:t>Killercoda — Endpoints·라운드로빈 확인</a:t>
             </a:r>
@@ -10101,6 +10293,8 @@
                   <a:srgbClr val="0D9488"/>
                 </a:solidFill>
                 <a:latin typeface="맑은 고딕"/>
+                <a:ea typeface="맑은 고딕"/>
+                <a:cs typeface="맑은 고딕"/>
               </a:rPr>
               <a:t>●  </a:t>
             </a:r>
@@ -10110,6 +10304,8 @@
                   <a:srgbClr val="222733"/>
                 </a:solidFill>
                 <a:latin typeface="맑은 고딕"/>
+                <a:ea typeface="맑은 고딕"/>
+                <a:cs typeface="맑은 고딕"/>
               </a:rPr>
               <a:t>kubectl get endpoints myapp  — 연결된 Pod IP 2개 확인</a:t>
             </a:r>
@@ -10126,6 +10322,8 @@
                   <a:srgbClr val="0D9488"/>
                 </a:solidFill>
                 <a:latin typeface="맑은 고딕"/>
+                <a:ea typeface="맑은 고딕"/>
+                <a:cs typeface="맑은 고딕"/>
               </a:rPr>
               <a:t>●  </a:t>
             </a:r>
@@ -10135,6 +10333,8 @@
                   <a:srgbClr val="222733"/>
                 </a:solidFill>
                 <a:latin typeface="맑은 고딕"/>
+                <a:ea typeface="맑은 고딕"/>
+                <a:cs typeface="맑은 고딕"/>
               </a:rPr>
               <a:t>for i in $(seq 1 10); do curl $(minikube service myapp --url); done</a:t>
             </a:r>
@@ -10151,6 +10351,8 @@
                   <a:srgbClr val="0D9488"/>
                 </a:solidFill>
                 <a:latin typeface="맑은 고딕"/>
+                <a:ea typeface="맑은 고딕"/>
+                <a:cs typeface="맑은 고딕"/>
               </a:rPr>
               <a:t>●  </a:t>
             </a:r>
@@ -10160,6 +10362,8 @@
                   <a:srgbClr val="222733"/>
                 </a:solidFill>
                 <a:latin typeface="맑은 고딕"/>
+                <a:ea typeface="맑은 고딕"/>
+                <a:cs typeface="맑은 고딕"/>
               </a:rPr>
               <a:t>응답이 두 Pod 사이를 오가는지 관찰 (nginx 기본 페이지라 응답 내용은 같을 수 있음 — kubectl logs로 어느 Pod가 요청을 받았는지 확인)</a:t>
             </a:r>
@@ -10195,6 +10399,8 @@
                   <a:srgbClr val="5B6373"/>
                 </a:solidFill>
                 <a:latin typeface="맑은 고딕"/>
+                <a:ea typeface="맑은 고딕"/>
+                <a:cs typeface="맑은 고딕"/>
               </a:rPr>
               <a:t>클라우드인프라관리  ·  5주차 3차시</a:t>
             </a:r>
@@ -10230,6 +10436,8 @@
                   <a:srgbClr val="5B6373"/>
                 </a:solidFill>
                 <a:latin typeface="맑은 고딕"/>
+                <a:ea typeface="맑은 고딕"/>
+                <a:cs typeface="맑은 고딕"/>
               </a:rPr>
               <a:t>09 / 12</a:t>
             </a:r>

--- a/class/cloud_infra_mgmt/05주차_Kubernetes핵심1/01_강의자료/3차시_Endpoints와라운드로빈.pptx
+++ b/class/cloud_infra_mgmt/05주차_Kubernetes핵심1/01_강의자료/3차시_Endpoints와라운드로빈.pptx
@@ -5358,7 +5358,7 @@
                 <a:ea typeface="맑은 고딕"/>
                 <a:cs typeface="맑은 고딕"/>
               </a:rPr>
-              <a:t>10 / 12</a:t>
+              <a:t>10 / 13</a:t>
             </a:r>
           </a:p>
         </p:txBody>
@@ -6542,7 +6542,7 @@
                 <a:ea typeface="맑은 고딕"/>
                 <a:cs typeface="맑은 고딕"/>
               </a:rPr>
-              <a:t>02 / 12</a:t>
+              <a:t>02 / 13</a:t>
             </a:r>
           </a:p>
         </p:txBody>
@@ -7800,7 +7800,7 @@
                 <a:ea typeface="맑은 고딕"/>
                 <a:cs typeface="맑은 고딕"/>
               </a:rPr>
-              <a:t>03 / 12</a:t>
+              <a:t>03 / 13</a:t>
             </a:r>
           </a:p>
         </p:txBody>
@@ -8616,7 +8616,7 @@
                 <a:ea typeface="맑은 고딕"/>
                 <a:cs typeface="맑은 고딕"/>
               </a:rPr>
-              <a:t>05 / 12</a:t>
+              <a:t>05 / 13</a:t>
             </a:r>
           </a:p>
         </p:txBody>
@@ -9513,7 +9513,7 @@
                 <a:ea typeface="맑은 고딕"/>
                 <a:cs typeface="맑은 고딕"/>
               </a:rPr>
-              <a:t>07 / 12</a:t>
+              <a:t>07 / 13</a:t>
             </a:r>
           </a:p>
         </p:txBody>
@@ -9976,7 +9976,7 @@
                 <a:ea typeface="맑은 고딕"/>
                 <a:cs typeface="맑은 고딕"/>
               </a:rPr>
-              <a:t>08 / 12</a:t>
+              <a:t>08 / 13</a:t>
             </a:r>
           </a:p>
         </p:txBody>
@@ -10439,7 +10439,7 @@
                 <a:ea typeface="맑은 고딕"/>
                 <a:cs typeface="맑은 고딕"/>
               </a:rPr>
-              <a:t>09 / 12</a:t>
+              <a:t>09 / 13</a:t>
             </a:r>
           </a:p>
         </p:txBody>
